--- a/Reporte 240426.pptx
+++ b/Reporte 240426.pptx
@@ -5,7 +5,7 @@
     <p:sldMasterId id="2147483672" r:id="rId1"/>
   </p:sldMasterIdLst>
   <p:notesMasterIdLst>
-    <p:notesMasterId r:id="rId15"/>
+    <p:notesMasterId r:id="rId14"/>
   </p:notesMasterIdLst>
   <p:sldIdLst>
     <p:sldId id="350" r:id="rId2"/>
@@ -18,32 +18,31 @@
     <p:sldId id="361" r:id="rId9"/>
     <p:sldId id="371" r:id="rId10"/>
     <p:sldId id="370" r:id="rId11"/>
-    <p:sldId id="384" r:id="rId12"/>
-    <p:sldId id="380" r:id="rId13"/>
-    <p:sldId id="280" r:id="rId14"/>
+    <p:sldId id="380" r:id="rId12"/>
+    <p:sldId id="280" r:id="rId13"/>
   </p:sldIdLst>
   <p:sldSz cx="9144000" cy="5143500" type="screen16x9"/>
   <p:notesSz cx="6858000" cy="9144000"/>
   <p:embeddedFontLst>
     <p:embeddedFont>
       <p:font typeface="Montserrat" panose="00000500000000000000" pitchFamily="2" charset="0"/>
-      <p:regular r:id="rId16"/>
-      <p:bold r:id="rId17"/>
-      <p:italic r:id="rId18"/>
-      <p:boldItalic r:id="rId19"/>
+      <p:regular r:id="rId15"/>
+      <p:bold r:id="rId16"/>
+      <p:italic r:id="rId17"/>
+      <p:boldItalic r:id="rId18"/>
     </p:embeddedFont>
     <p:embeddedFont>
       <p:font typeface="Montserrat Black" panose="00000A00000000000000" pitchFamily="2" charset="0"/>
-      <p:bold r:id="rId20"/>
-      <p:italic r:id="rId21"/>
-      <p:boldItalic r:id="rId22"/>
+      <p:bold r:id="rId19"/>
+      <p:italic r:id="rId20"/>
+      <p:boldItalic r:id="rId21"/>
     </p:embeddedFont>
     <p:embeddedFont>
       <p:font typeface="Segoe UI" panose="020B0502040204020203" pitchFamily="34" charset="0"/>
-      <p:regular r:id="rId23"/>
-      <p:bold r:id="rId24"/>
-      <p:italic r:id="rId25"/>
-      <p:boldItalic r:id="rId26"/>
+      <p:regular r:id="rId22"/>
+      <p:bold r:id="rId23"/>
+      <p:italic r:id="rId24"/>
+      <p:boldItalic r:id="rId25"/>
     </p:embeddedFont>
   </p:embeddedFontLst>
   <p:defaultTextStyle>
@@ -6052,7 +6051,31 @@
                 <a:latin typeface="Montserrat Black"/>
                 <a:sym typeface="Arial"/>
               </a:rPr>
-              <a:t>Elaborado: 23</a:t>
+              <a:t>Elaborado</a:t>
+            </a:r>
+            <a:r>
+              <a:rPr kumimoji="0" lang="es-MX" sz="1600" b="0" i="0" u="none" strike="noStrike" kern="0" cap="none" spc="0" normalizeH="0" baseline="0" noProof="0">
+                <a:ln>
+                  <a:noFill/>
+                </a:ln>
+                <a:solidFill>
+                  <a:srgbClr val="D8AB72"/>
+                </a:solidFill>
+                <a:effectLst/>
+                <a:uLnTx/>
+                <a:uFillTx/>
+                <a:latin typeface="Montserrat Black"/>
+                <a:sym typeface="Arial"/>
+              </a:rPr>
+              <a:t>: 24</a:t>
+            </a:r>
+            <a:r>
+              <a:rPr lang="es-MX" sz="1600">
+                <a:solidFill>
+                  <a:srgbClr val="D8AB72"/>
+                </a:solidFill>
+              </a:rPr>
+              <a:t> </a:t>
             </a:r>
             <a:r>
               <a:rPr lang="es-MX" sz="1600" dirty="0">
@@ -6060,7 +6083,7 @@
                   <a:srgbClr val="D8AB72"/>
                 </a:solidFill>
               </a:rPr>
-              <a:t> de abril</a:t>
+              <a:t>de abril</a:t>
             </a:r>
           </a:p>
           <a:p>
@@ -6172,10 +6195,10 @@
       </p:sp>
       <p:pic>
         <p:nvPicPr>
-          <p:cNvPr id="4" name="Imagen 3">
+          <p:cNvPr id="3" name="Imagen 2">
             <a:extLst>
               <a:ext uri="{FF2B5EF4-FFF2-40B4-BE49-F238E27FC236}">
-                <a16:creationId xmlns:a16="http://schemas.microsoft.com/office/drawing/2014/main" id="{C6D33F92-DF2D-475B-81B1-7217A1935E22}"/>
+                <a16:creationId xmlns:a16="http://schemas.microsoft.com/office/drawing/2014/main" id="{1FB9C758-21B5-205A-9A52-9C0E473EEDEE}"/>
               </a:ext>
             </a:extLst>
           </p:cNvPr>
@@ -6192,8 +6215,8 @@
         </p:blipFill>
         <p:spPr>
           <a:xfrm>
-            <a:off x="0" y="1409834"/>
-            <a:ext cx="9144000" cy="2466707"/>
+            <a:off x="0" y="1362186"/>
+            <a:ext cx="9144000" cy="2419128"/>
           </a:xfrm>
           <a:prstGeom prst="rect">
             <a:avLst/>
@@ -6214,110 +6237,6 @@
 </file>
 
 <file path=ppt/slides/slide11.xml><?xml version="1.0" encoding="utf-8"?>
-<p:sld xmlns:a="http://schemas.openxmlformats.org/drawingml/2006/main" xmlns:r="http://schemas.openxmlformats.org/officeDocument/2006/relationships" xmlns:p="http://schemas.openxmlformats.org/presentationml/2006/main">
-  <p:cSld>
-    <p:spTree>
-      <p:nvGrpSpPr>
-        <p:cNvPr id="1" name="">
-          <a:extLst>
-            <a:ext uri="{FF2B5EF4-FFF2-40B4-BE49-F238E27FC236}">
-              <a16:creationId xmlns:a16="http://schemas.microsoft.com/office/drawing/2014/main" id="{C91F1244-19EC-0EAD-B6B6-7DE5F3AE9E1B}"/>
-            </a:ext>
-          </a:extLst>
-        </p:cNvPr>
-        <p:cNvGrpSpPr/>
-        <p:nvPr/>
-      </p:nvGrpSpPr>
-      <p:grpSpPr>
-        <a:xfrm>
-          <a:off x="0" y="0"/>
-          <a:ext cx="0" cy="0"/>
-          <a:chOff x="0" y="0"/>
-          <a:chExt cx="0" cy="0"/>
-        </a:xfrm>
-      </p:grpSpPr>
-      <p:sp>
-        <p:nvSpPr>
-          <p:cNvPr id="8" name="CuadroTexto 7">
-            <a:extLst>
-              <a:ext uri="{FF2B5EF4-FFF2-40B4-BE49-F238E27FC236}">
-                <a16:creationId xmlns:a16="http://schemas.microsoft.com/office/drawing/2014/main" id="{663A989B-13BA-D6AB-C954-BA6B16ED666A}"/>
-              </a:ext>
-            </a:extLst>
-          </p:cNvPr>
-          <p:cNvSpPr txBox="1"/>
-          <p:nvPr/>
-        </p:nvSpPr>
-        <p:spPr>
-          <a:xfrm>
-            <a:off x="1926166" y="0"/>
-            <a:ext cx="5291667" cy="307777"/>
-          </a:xfrm>
-          <a:prstGeom prst="rect">
-            <a:avLst/>
-          </a:prstGeom>
-          <a:noFill/>
-        </p:spPr>
-        <p:txBody>
-          <a:bodyPr wrap="square" rtlCol="0">
-            <a:spAutoFit/>
-          </a:bodyPr>
-          <a:lstStyle/>
-          <a:p>
-            <a:pPr algn="ctr"/>
-            <a:r>
-              <a:rPr lang="es-MX" b="1" dirty="0">
-                <a:latin typeface="Montserrat" pitchFamily="2" charset="0"/>
-              </a:rPr>
-              <a:t>Temas de gobierno por radiodifusora</a:t>
-            </a:r>
-          </a:p>
-        </p:txBody>
-      </p:sp>
-      <p:pic>
-        <p:nvPicPr>
-          <p:cNvPr id="2" name="Imagen 1">
-            <a:extLst>
-              <a:ext uri="{FF2B5EF4-FFF2-40B4-BE49-F238E27FC236}">
-                <a16:creationId xmlns:a16="http://schemas.microsoft.com/office/drawing/2014/main" id="{AF66BBB5-9FC0-CECD-38C7-1464B903C2A2}"/>
-              </a:ext>
-            </a:extLst>
-          </p:cNvPr>
-          <p:cNvPicPr>
-            <a:picLocks noChangeAspect="1"/>
-          </p:cNvPicPr>
-          <p:nvPr/>
-        </p:nvPicPr>
-        <p:blipFill>
-          <a:blip r:embed="rId2"/>
-          <a:stretch>
-            <a:fillRect/>
-          </a:stretch>
-        </p:blipFill>
-        <p:spPr>
-          <a:xfrm>
-            <a:off x="2038350" y="658200"/>
-            <a:ext cx="5067300" cy="3810000"/>
-          </a:xfrm>
-          <a:prstGeom prst="rect">
-            <a:avLst/>
-          </a:prstGeom>
-        </p:spPr>
-      </p:pic>
-    </p:spTree>
-    <p:extLst>
-      <p:ext uri="{BB962C8B-B14F-4D97-AF65-F5344CB8AC3E}">
-        <p14:creationId xmlns:p14="http://schemas.microsoft.com/office/powerpoint/2010/main" val="680593400"/>
-      </p:ext>
-    </p:extLst>
-  </p:cSld>
-  <p:clrMapOvr>
-    <a:masterClrMapping/>
-  </p:clrMapOvr>
-</p:sld>
-</file>
-
-<file path=ppt/slides/slide12.xml><?xml version="1.0" encoding="utf-8"?>
 <p:sld xmlns:a="http://schemas.openxmlformats.org/drawingml/2006/main" xmlns:r="http://schemas.openxmlformats.org/officeDocument/2006/relationships" xmlns:p="http://schemas.openxmlformats.org/presentationml/2006/main">
   <p:cSld>
     <p:spTree>
@@ -6379,10 +6298,10 @@
       </p:sp>
       <p:pic>
         <p:nvPicPr>
-          <p:cNvPr id="4" name="Imagen 3">
+          <p:cNvPr id="3" name="Imagen 2">
             <a:extLst>
               <a:ext uri="{FF2B5EF4-FFF2-40B4-BE49-F238E27FC236}">
-                <a16:creationId xmlns:a16="http://schemas.microsoft.com/office/drawing/2014/main" id="{5D570CFA-3EA9-4511-1BB8-94B56D485BC4}"/>
+                <a16:creationId xmlns:a16="http://schemas.microsoft.com/office/drawing/2014/main" id="{D283C4F7-A449-9A15-6C3B-5B6636990056}"/>
               </a:ext>
             </a:extLst>
           </p:cNvPr>
@@ -6399,8 +6318,8 @@
         </p:blipFill>
         <p:spPr>
           <a:xfrm>
-            <a:off x="0" y="533843"/>
-            <a:ext cx="9144000" cy="4075814"/>
+            <a:off x="2347602" y="495010"/>
+            <a:ext cx="4448796" cy="4153480"/>
           </a:xfrm>
           <a:prstGeom prst="rect">
             <a:avLst/>
@@ -6420,7 +6339,7 @@
 </p:sld>
 </file>
 
-<file path=ppt/slides/slide13.xml><?xml version="1.0" encoding="utf-8"?>
+<file path=ppt/slides/slide12.xml><?xml version="1.0" encoding="utf-8"?>
 <p:sld xmlns:a="http://schemas.openxmlformats.org/drawingml/2006/main" xmlns:r="http://schemas.openxmlformats.org/officeDocument/2006/relationships" xmlns:p="http://schemas.openxmlformats.org/presentationml/2006/main">
   <p:cSld>
     <p:spTree>
@@ -6547,10 +6466,10 @@
       </p:sp>
       <p:pic>
         <p:nvPicPr>
-          <p:cNvPr id="3" name="Imagen 2">
+          <p:cNvPr id="4" name="Imagen 3">
             <a:extLst>
               <a:ext uri="{FF2B5EF4-FFF2-40B4-BE49-F238E27FC236}">
-                <a16:creationId xmlns:a16="http://schemas.microsoft.com/office/drawing/2014/main" id="{D1F92B6B-36BB-DEBD-B37A-A5F760593CB2}"/>
+                <a16:creationId xmlns:a16="http://schemas.microsoft.com/office/drawing/2014/main" id="{477F63FC-EA47-1D2A-BA95-D8B41C86D7D4}"/>
               </a:ext>
             </a:extLst>
           </p:cNvPr>
@@ -6567,8 +6486,8 @@
         </p:blipFill>
         <p:spPr>
           <a:xfrm>
-            <a:off x="0" y="523220"/>
-            <a:ext cx="9144000" cy="4254055"/>
+            <a:off x="0" y="547894"/>
+            <a:ext cx="9144000" cy="4190587"/>
           </a:xfrm>
           <a:prstGeom prst="rect">
             <a:avLst/>
@@ -6655,10 +6574,10 @@
       </p:sp>
       <p:pic>
         <p:nvPicPr>
-          <p:cNvPr id="4" name="Imagen 3">
+          <p:cNvPr id="3" name="Imagen 2">
             <a:extLst>
               <a:ext uri="{FF2B5EF4-FFF2-40B4-BE49-F238E27FC236}">
-                <a16:creationId xmlns:a16="http://schemas.microsoft.com/office/drawing/2014/main" id="{AF85027C-23F3-CD4E-E271-04EEEA80F6A8}"/>
+                <a16:creationId xmlns:a16="http://schemas.microsoft.com/office/drawing/2014/main" id="{FBDFA8F0-4C7B-5F93-A89D-4146B343328E}"/>
               </a:ext>
             </a:extLst>
           </p:cNvPr>
@@ -6675,8 +6594,8 @@
         </p:blipFill>
         <p:spPr>
           <a:xfrm>
-            <a:off x="0" y="1105878"/>
-            <a:ext cx="9144000" cy="3074620"/>
+            <a:off x="0" y="1046090"/>
+            <a:ext cx="9144000" cy="3051319"/>
           </a:xfrm>
           <a:prstGeom prst="rect">
             <a:avLst/>
@@ -6713,36 +6632,6 @@
           <a:chExt cx="0" cy="0"/>
         </a:xfrm>
       </p:grpSpPr>
-      <p:pic>
-        <p:nvPicPr>
-          <p:cNvPr id="10" name="Imagen 9">
-            <a:extLst>
-              <a:ext uri="{FF2B5EF4-FFF2-40B4-BE49-F238E27FC236}">
-                <a16:creationId xmlns:a16="http://schemas.microsoft.com/office/drawing/2014/main" id="{24FFE48F-C653-2543-9F6B-313A1EA9A044}"/>
-              </a:ext>
-            </a:extLst>
-          </p:cNvPr>
-          <p:cNvPicPr>
-            <a:picLocks noChangeAspect="1"/>
-          </p:cNvPicPr>
-          <p:nvPr/>
-        </p:nvPicPr>
-        <p:blipFill>
-          <a:blip r:embed="rId2"/>
-          <a:stretch>
-            <a:fillRect/>
-          </a:stretch>
-        </p:blipFill>
-        <p:spPr>
-          <a:xfrm>
-            <a:off x="0" y="405235"/>
-            <a:ext cx="9144000" cy="2590630"/>
-          </a:xfrm>
-          <a:prstGeom prst="rect">
-            <a:avLst/>
-          </a:prstGeom>
-        </p:spPr>
-      </p:pic>
       <p:sp>
         <p:nvSpPr>
           <p:cNvPr id="7" name="CuadroTexto 6">
@@ -6789,10 +6678,10 @@
       </p:sp>
       <p:pic>
         <p:nvPicPr>
-          <p:cNvPr id="12" name="Imagen 11">
+          <p:cNvPr id="3" name="Imagen 2">
             <a:extLst>
               <a:ext uri="{FF2B5EF4-FFF2-40B4-BE49-F238E27FC236}">
-                <a16:creationId xmlns:a16="http://schemas.microsoft.com/office/drawing/2014/main" id="{949FF528-5C6C-2D52-4BAB-1BA081AE24EF}"/>
+                <a16:creationId xmlns:a16="http://schemas.microsoft.com/office/drawing/2014/main" id="{9A9189D4-6B15-4CFF-5C19-22B78393C851}"/>
               </a:ext>
             </a:extLst>
           </p:cNvPr>
@@ -6802,15 +6691,15 @@
           <p:nvPr/>
         </p:nvPicPr>
         <p:blipFill>
-          <a:blip r:embed="rId3"/>
+          <a:blip r:embed="rId2"/>
           <a:stretch>
             <a:fillRect/>
           </a:stretch>
         </p:blipFill>
         <p:spPr>
           <a:xfrm>
-            <a:off x="0" y="2995865"/>
-            <a:ext cx="3722400" cy="610145"/>
+            <a:off x="656678" y="1447643"/>
+            <a:ext cx="7830643" cy="2248214"/>
           </a:xfrm>
           <a:prstGeom prst="rect">
             <a:avLst/>
@@ -6895,10 +6784,10 @@
       </p:sp>
       <p:pic>
         <p:nvPicPr>
-          <p:cNvPr id="5" name="Imagen 4">
+          <p:cNvPr id="4" name="Imagen 3">
             <a:extLst>
               <a:ext uri="{FF2B5EF4-FFF2-40B4-BE49-F238E27FC236}">
-                <a16:creationId xmlns:a16="http://schemas.microsoft.com/office/drawing/2014/main" id="{B6768796-87C8-1993-6DFB-A0A47B071B08}"/>
+                <a16:creationId xmlns:a16="http://schemas.microsoft.com/office/drawing/2014/main" id="{E5D62587-1053-80CC-623F-1B09A6A5DADA}"/>
               </a:ext>
             </a:extLst>
           </p:cNvPr>
@@ -6915,8 +6804,8 @@
         </p:blipFill>
         <p:spPr>
           <a:xfrm>
-            <a:off x="0" y="452279"/>
-            <a:ext cx="9144000" cy="4381817"/>
+            <a:off x="0" y="433388"/>
+            <a:ext cx="9144000" cy="4419600"/>
           </a:xfrm>
           <a:prstGeom prst="rect">
             <a:avLst/>
@@ -6993,10 +6882,10 @@
       </p:sp>
       <p:pic>
         <p:nvPicPr>
-          <p:cNvPr id="3" name="Imagen 2">
+          <p:cNvPr id="4" name="Imagen 3">
             <a:extLst>
               <a:ext uri="{FF2B5EF4-FFF2-40B4-BE49-F238E27FC236}">
-                <a16:creationId xmlns:a16="http://schemas.microsoft.com/office/drawing/2014/main" id="{4D5D6F33-328F-A7ED-4A21-E063D4E3C4A7}"/>
+                <a16:creationId xmlns:a16="http://schemas.microsoft.com/office/drawing/2014/main" id="{1066DBC5-3D0E-D4A2-9752-ACCAC693C6DB}"/>
               </a:ext>
             </a:extLst>
           </p:cNvPr>
@@ -7013,8 +6902,8 @@
         </p:blipFill>
         <p:spPr>
           <a:xfrm>
-            <a:off x="0" y="968025"/>
-            <a:ext cx="9144000" cy="3207449"/>
+            <a:off x="0" y="986157"/>
+            <a:ext cx="9144000" cy="3171185"/>
           </a:xfrm>
           <a:prstGeom prst="rect">
             <a:avLst/>
@@ -7097,10 +6986,10 @@
       </p:sp>
       <p:pic>
         <p:nvPicPr>
-          <p:cNvPr id="3" name="Imagen 2">
+          <p:cNvPr id="4" name="Imagen 3">
             <a:extLst>
               <a:ext uri="{FF2B5EF4-FFF2-40B4-BE49-F238E27FC236}">
-                <a16:creationId xmlns:a16="http://schemas.microsoft.com/office/drawing/2014/main" id="{62C4DE24-5491-43F6-2508-D520F9E0F218}"/>
+                <a16:creationId xmlns:a16="http://schemas.microsoft.com/office/drawing/2014/main" id="{4F744C4E-7989-E42A-6719-D2977E6A4322}"/>
               </a:ext>
             </a:extLst>
           </p:cNvPr>
@@ -7117,8 +7006,8 @@
         </p:blipFill>
         <p:spPr>
           <a:xfrm>
-            <a:off x="50400" y="810849"/>
-            <a:ext cx="9144000" cy="3664677"/>
+            <a:off x="0" y="512950"/>
+            <a:ext cx="9144000" cy="4260475"/>
           </a:xfrm>
           <a:prstGeom prst="rect">
             <a:avLst/>
@@ -7195,10 +7084,10 @@
       </p:sp>
       <p:pic>
         <p:nvPicPr>
-          <p:cNvPr id="4" name="Imagen 3">
+          <p:cNvPr id="5" name="Imagen 4">
             <a:extLst>
               <a:ext uri="{FF2B5EF4-FFF2-40B4-BE49-F238E27FC236}">
-                <a16:creationId xmlns:a16="http://schemas.microsoft.com/office/drawing/2014/main" id="{53F99323-CE9E-8481-B408-8FA0CFBC5751}"/>
+                <a16:creationId xmlns:a16="http://schemas.microsoft.com/office/drawing/2014/main" id="{F0AD1A7B-525F-AD9D-A68B-1ADF0105687F}"/>
               </a:ext>
             </a:extLst>
           </p:cNvPr>
@@ -7215,8 +7104,8 @@
         </p:blipFill>
         <p:spPr>
           <a:xfrm>
-            <a:off x="0" y="866936"/>
-            <a:ext cx="9144000" cy="3409627"/>
+            <a:off x="0" y="859767"/>
+            <a:ext cx="9144000" cy="3423965"/>
           </a:xfrm>
           <a:prstGeom prst="rect">
             <a:avLst/>
@@ -7293,10 +7182,10 @@
       </p:sp>
       <p:pic>
         <p:nvPicPr>
-          <p:cNvPr id="3" name="Imagen 2">
+          <p:cNvPr id="4" name="Imagen 3">
             <a:extLst>
               <a:ext uri="{FF2B5EF4-FFF2-40B4-BE49-F238E27FC236}">
-                <a16:creationId xmlns:a16="http://schemas.microsoft.com/office/drawing/2014/main" id="{52801B61-C20D-5FEB-E1F2-E758E39E280A}"/>
+                <a16:creationId xmlns:a16="http://schemas.microsoft.com/office/drawing/2014/main" id="{603F310A-9954-84C2-0DD1-64AFDAEC3A42}"/>
               </a:ext>
             </a:extLst>
           </p:cNvPr>
@@ -7313,8 +7202,8 @@
         </p:blipFill>
         <p:spPr>
           <a:xfrm>
-            <a:off x="0" y="1255645"/>
-            <a:ext cx="9144000" cy="2632209"/>
+            <a:off x="0" y="1276775"/>
+            <a:ext cx="9144000" cy="2589949"/>
           </a:xfrm>
           <a:prstGeom prst="rect">
             <a:avLst/>
